--- a/Topic_B/Exam_Practice/TB-L03_Writing_Workshop_Appearance_and_Personality.pptx
+++ b/Topic_B/Exam_Practice/TB-L03_Writing_Workshop_Appearance_and_Personality.pptx
@@ -784,7 +784,11 @@
           <a:lstStyle/>
           <a:p>
             <a:r>
-              <a:rPr lang="en-US" dirty="0"/>
+              <a:rPr lang="ar-SA" dirty="0">
+                <a:latin typeface="Amiri" pitchFamily="2" charset="-78"/>
+                <a:ea typeface="Amiri" pitchFamily="2" charset="-78"/>
+                <a:cs typeface="Amiri" pitchFamily="2" charset="-78"/>
+              </a:rPr>
               <a:t>Q3 (3 min to choose and read). Title (أ) suits Core and Develop; title (ب) suits Stretch.</a:t>
             </a:r>
             <a:endParaRPr lang="en-US" dirty="0"/>
@@ -1403,7 +1407,11 @@
           <a:lstStyle/>
           <a:p>
             <a:r>
-              <a:rPr lang="en-US" dirty="0"/>
+              <a:rPr lang="ar-SA" dirty="0">
+                <a:latin typeface="Amiri" pitchFamily="2" charset="-78"/>
+                <a:ea typeface="Amiri" pitchFamily="2" charset="-78"/>
+                <a:cs typeface="Amiri" pitchFamily="2" charset="-78"/>
+              </a:rPr>
               <a:t>WELCOME (1 min) — while students join.
 • Greet each student by name as they arrive: السَّلَامُ عَلَيْكُمْ. Take the register (Pastoral Tracker: attendance 0/1).
 • 2-MINUTE CHECK-IN (SEND training): a private chat to any student who seemed unsettled last lesson — “Are you okay today? 👍 / 👎”.
@@ -1936,7 +1944,11 @@
           <a:lstStyle/>
           <a:p>
             <a:r>
-              <a:rPr lang="en-US" dirty="0"/>
+              <a:rPr lang="ar-SA" dirty="0">
+                <a:latin typeface="Amiri" pitchFamily="2" charset="-78"/>
+                <a:ea typeface="Amiri" pitchFamily="2" charset="-78"/>
+                <a:cs typeface="Amiri" pitchFamily="2" charset="-78"/>
+              </a:rPr>
               <a:t>Question words: كَيْفَ (what … like) · مَاذَا (what) — bullet 3 is PAST (faʿalat = she did); bullet 4 is the DUAL future (satafʿalāni = you two will do).</a:t>
             </a:r>
             <a:endParaRPr lang="en-US" dirty="0"/>
@@ -2508,6 +2520,7 @@
                   <a:srgbClr val="D4AF37"/>
                 </a:solidFill>
                 <a:latin typeface="Amiri" pitchFamily="2" charset="-78"/>
+                <a:ea typeface="Amiri" pitchFamily="2" charset="-78"/>
                 <a:cs typeface="Amiri" pitchFamily="2" charset="-78"/>
               </a:rPr>
               <a:t>م</a:t>
@@ -2714,6 +2727,7 @@
                   <a:srgbClr val="D4AF37"/>
                 </a:solidFill>
                 <a:latin typeface="Amiri" pitchFamily="2" charset="-78"/>
+                <a:ea typeface="Amiri" pitchFamily="2" charset="-78"/>
                 <a:cs typeface="Amiri" pitchFamily="2" charset="-78"/>
               </a:rPr>
               <a:t>وَرْشَةُ الكِتَابَةِ — المَظْهَرُ وَالشَّخْصِيَّةُ</a:t>
@@ -3171,6 +3185,7 @@
                   <a:srgbClr val="D4AF37"/>
                 </a:solidFill>
                 <a:latin typeface="Amiri" pitchFamily="2" charset="-78"/>
+                <a:ea typeface="Amiri" pitchFamily="2" charset="-78"/>
                 <a:cs typeface="Amiri" pitchFamily="2" charset="-78"/>
               </a:rPr>
               <a:t>م</a:t>
@@ -3491,6 +3506,7 @@
                   <a:srgbClr val="8A6D1E"/>
                 </a:solidFill>
                 <a:latin typeface="Amiri" pitchFamily="2" charset="-78"/>
+                <a:ea typeface="Amiri" pitchFamily="2" charset="-78"/>
                 <a:cs typeface="Amiri" pitchFamily="2" charset="-78"/>
               </a:rPr>
               <a:t>نَمُوذَجُ الإِجَابَةِ</a:t>
@@ -3604,6 +3620,7 @@
                   <a:srgbClr val="1F2A37"/>
                 </a:solidFill>
                 <a:latin typeface="Amiri" pitchFamily="2" charset="-78"/>
+                <a:ea typeface="Amiri" pitchFamily="2" charset="-78"/>
                 <a:cs typeface="Amiri" pitchFamily="2" charset="-78"/>
               </a:rPr>
               <a:t>مَرْحَبًا يَا نُورُ،</a:t>
@@ -3623,6 +3640,7 @@
                   <a:srgbClr val="1F2A37"/>
                 </a:solidFill>
                 <a:latin typeface="Amiri" pitchFamily="2" charset="-78"/>
+                <a:ea typeface="Amiri" pitchFamily="2" charset="-78"/>
                 <a:cs typeface="Amiri" pitchFamily="2" charset="-78"/>
               </a:rPr>
               <a:t>كَيْفَ حَالُكِ؟ عِنْدِي صَدِيقَةٌ جَدِيدَةٌ فِي المَدْرَسَةِ اسْمُهَا رَانْيَا. هِيَ طَوِيلَةٌ وَنَحِيفَةٌ، وَشَعْرُهَا أَسْوَدُ وَطَوِيلٌ، وَعَيْنَاهَا خَضْرَاوَانِ. تَلْبَسُ نَظَّارَةً صَغِيرَةً. رَانْيَا لَطِيفَةٌ وَذَكِيَّةٌ، لٰكِنَّهَا خَجُولَةٌ قَلِيلًا. هِيَ لَيْسَتْ مَغْرُورَةً أَبَدًا. أَمْسِ سَاعَدَتْنِي فِي وَاجِبِ الرِّيَاضِيَّاتِ، فَشَكَرْتُهَا كَثِيرًا. فِي نِهَايَةِ الأُسْبُوعِ سَنَذْهَبُ إِلَى المَكْتَبَةِ مَعًا. أَتَمَنَّى أَنْ تَتَعَرَّفِي إِلَيْهَا قَرِيبًا!</a:t>
@@ -3642,6 +3660,7 @@
                   <a:srgbClr val="1F2A37"/>
                 </a:solidFill>
                 <a:latin typeface="Amiri" pitchFamily="2" charset="-78"/>
+                <a:ea typeface="Amiri" pitchFamily="2" charset="-78"/>
                 <a:cs typeface="Amiri" pitchFamily="2" charset="-78"/>
               </a:rPr>
               <a:t>مَعَ السَّلَامَةِ،</a:t>
@@ -3661,6 +3680,7 @@
                   <a:srgbClr val="1F2A37"/>
                 </a:solidFill>
                 <a:latin typeface="Amiri" pitchFamily="2" charset="-78"/>
+                <a:ea typeface="Amiri" pitchFamily="2" charset="-78"/>
                 <a:cs typeface="Amiri" pitchFamily="2" charset="-78"/>
               </a:rPr>
               <a:t>لَيْلَى</a:t>
@@ -3824,11 +3844,12 @@
               <a:buNone/>
             </a:pPr>
             <a:r>
-              <a:rPr lang="en-US" sz="950" b="1" dirty="0">
+              <a:rPr lang="ar-SA" sz="950" b="1" dirty="0">
                 <a:solidFill>
                   <a:srgbClr val="FFFFFF"/>
                 </a:solidFill>
                 <a:latin typeface="Calibri" pitchFamily="34" charset="0"/>
+                <a:ea typeface="Amiri" pitchFamily="2" charset="-78"/>
                 <a:cs typeface="Amiri" pitchFamily="2" charset="-78"/>
               </a:rPr>
               <a:t>هِيَ طَوِيلَةٌ</a:t>
@@ -3889,11 +3910,12 @@
               <a:buNone/>
             </a:pPr>
             <a:r>
-              <a:rPr lang="en-US" sz="950" b="1" dirty="0">
+              <a:rPr lang="ar-SA" sz="950" b="1" dirty="0">
                 <a:solidFill>
                   <a:srgbClr val="FFFFFF"/>
                 </a:solidFill>
                 <a:latin typeface="Calibri" pitchFamily="34" charset="0"/>
+                <a:ea typeface="Amiri" pitchFamily="2" charset="-78"/>
                 <a:cs typeface="Amiri" pitchFamily="2" charset="-78"/>
               </a:rPr>
               <a:t>عَيْنَاهَا خَضْرَاوَانِ</a:t>
@@ -3954,11 +3976,12 @@
               <a:buNone/>
             </a:pPr>
             <a:r>
-              <a:rPr lang="en-US" sz="950" b="1" dirty="0">
+              <a:rPr lang="ar-SA" sz="950" b="1" dirty="0">
                 <a:solidFill>
                   <a:srgbClr val="FFFFFF"/>
                 </a:solidFill>
                 <a:latin typeface="Calibri" pitchFamily="34" charset="0"/>
+                <a:ea typeface="Amiri" pitchFamily="2" charset="-78"/>
                 <a:cs typeface="Amiri" pitchFamily="2" charset="-78"/>
               </a:rPr>
               <a:t>لَيْسَتْ مَغْرُورَةً</a:t>
@@ -4019,11 +4042,12 @@
               <a:buNone/>
             </a:pPr>
             <a:r>
-              <a:rPr lang="en-US" sz="950" b="1" dirty="0">
+              <a:rPr lang="ar-SA" sz="950" b="1" dirty="0">
                 <a:solidFill>
                   <a:srgbClr val="FFFFFF"/>
                 </a:solidFill>
                 <a:latin typeface="Calibri" pitchFamily="34" charset="0"/>
+                <a:ea typeface="Amiri" pitchFamily="2" charset="-78"/>
                 <a:cs typeface="Amiri" pitchFamily="2" charset="-78"/>
               </a:rPr>
               <a:t>سَنَذْهَبُ</a:t>
@@ -4157,6 +4181,7 @@
                   <a:srgbClr val="D4AF37"/>
                 </a:solidFill>
                 <a:latin typeface="Amiri" pitchFamily="2" charset="-78"/>
+                <a:ea typeface="Amiri" pitchFamily="2" charset="-78"/>
                 <a:cs typeface="Amiri" pitchFamily="2" charset="-78"/>
               </a:rPr>
               <a:t>م</a:t>
@@ -4477,6 +4502,7 @@
                   <a:srgbClr val="8A6D1E"/>
                 </a:solidFill>
                 <a:latin typeface="Amiri" pitchFamily="2" charset="-78"/>
+                <a:ea typeface="Amiri" pitchFamily="2" charset="-78"/>
                 <a:cs typeface="Amiri" pitchFamily="2" charset="-78"/>
               </a:rPr>
               <a:t>نَمُوذَجُ الإِجَابَةِ</a:t>
@@ -4590,6 +4616,7 @@
                   <a:srgbClr val="1F2A37"/>
                 </a:solidFill>
                 <a:latin typeface="Amiri" pitchFamily="2" charset="-78"/>
+                <a:ea typeface="Amiri" pitchFamily="2" charset="-78"/>
                 <a:cs typeface="Amiri" pitchFamily="2" charset="-78"/>
               </a:rPr>
               <a:t>عَزِيزَتِي نُورُ،</a:t>
@@ -4609,6 +4636,7 @@
                   <a:srgbClr val="1F2A37"/>
                 </a:solidFill>
                 <a:latin typeface="Amiri" pitchFamily="2" charset="-78"/>
+                <a:ea typeface="Amiri" pitchFamily="2" charset="-78"/>
                 <a:cs typeface="Amiri" pitchFamily="2" charset="-78"/>
               </a:rPr>
               <a:t>تَحِيَّةً طَيِّبَةً، وَبَعْدُ، فَأُرِيدُ أَنْ أُحَدِّثَكِ عَنْ رَانْيَا، الطَّالِبَةِ الجَدِيدَةِ الَّتِي أَصْبَحَتْ صَدِيقَتِي المُقَرَّبَةَ. هِيَ طَوِيلَةٌ وَنَحِيفَةٌ، شَعْرُهَا أَسْوَدُ طَوِيلٌ، وَعَيْنَاهَا خَضْرَاوَانِ تَخْتَبِئَانِ خَلْفَ نَظَّارَةٍ صَغِيرَةٍ. فِي البِدَايَةِ ظَنَنْتُ أَنَّهَا مَغْرُورَةٌ، لِأَنَّهَا لَا تَتَكَلَّمُ كَثِيرًا، لٰكِنِّي اكْتَشَفْتُ أَنَّهَا لَيْسَتْ مَغْرُورَةً، بَلْ خَجُولَةٌ فَقَطْ. وَهِيَ أَيْضًا ذَكِيَّةٌ وَكَرِيمَةٌ؛ فَأَمْسِ بَقِيَتْ مَعِي بَعْدَ الدَّوَامِ سَاعَةً كَامِلَةً لِتَشْرَحَ لِي دَرْسَ الكِيمْيَاءِ الصَّعْبَ، وَلَمْ تَطْلُبْ شَيْئًا. فِي نِهَايَةِ الأُسْبُوعِ سَنَزُورُ المَكْتَبَةَ العَامَّةَ مَعًا، وَإِذَا جِئْتِ لِزِيَارَتِي فِي الصَّيْفِ، فَسَأُعَرِّفُكِ إِلَيْهَا.</a:t>
@@ -4628,6 +4656,7 @@
                   <a:srgbClr val="1F2A37"/>
                 </a:solidFill>
                 <a:latin typeface="Amiri" pitchFamily="2" charset="-78"/>
+                <a:ea typeface="Amiri" pitchFamily="2" charset="-78"/>
                 <a:cs typeface="Amiri" pitchFamily="2" charset="-78"/>
               </a:rPr>
               <a:t>مَعَ مَحَبَّتِي،</a:t>
@@ -4647,6 +4676,7 @@
                   <a:srgbClr val="1F2A37"/>
                 </a:solidFill>
                 <a:latin typeface="Amiri" pitchFamily="2" charset="-78"/>
+                <a:ea typeface="Amiri" pitchFamily="2" charset="-78"/>
                 <a:cs typeface="Amiri" pitchFamily="2" charset="-78"/>
               </a:rPr>
               <a:t>لَيْلَى</a:t>
@@ -4810,11 +4840,12 @@
               <a:buNone/>
             </a:pPr>
             <a:r>
-              <a:rPr lang="en-US" sz="950" b="1" dirty="0">
+              <a:rPr lang="ar-SA" sz="950" b="1" dirty="0">
                 <a:solidFill>
                   <a:srgbClr val="FFFFFF"/>
                 </a:solidFill>
                 <a:latin typeface="Calibri" pitchFamily="34" charset="0"/>
+                <a:ea typeface="Amiri" pitchFamily="2" charset="-78"/>
                 <a:cs typeface="Amiri" pitchFamily="2" charset="-78"/>
               </a:rPr>
               <a:t>الَّتِي أَصْبَحَتْ</a:t>
@@ -4875,11 +4906,12 @@
               <a:buNone/>
             </a:pPr>
             <a:r>
-              <a:rPr lang="en-US" sz="950" b="1" dirty="0">
+              <a:rPr lang="ar-SA" sz="950" b="1" dirty="0">
                 <a:solidFill>
                   <a:srgbClr val="FFFFFF"/>
                 </a:solidFill>
                 <a:latin typeface="Calibri" pitchFamily="34" charset="0"/>
+                <a:ea typeface="Amiri" pitchFamily="2" charset="-78"/>
                 <a:cs typeface="Amiri" pitchFamily="2" charset="-78"/>
               </a:rPr>
               <a:t>ظَنَنْتُ أَنَّهَا</a:t>
@@ -4940,11 +4972,12 @@
               <a:buNone/>
             </a:pPr>
             <a:r>
-              <a:rPr lang="en-US" sz="950" b="1" dirty="0">
+              <a:rPr lang="ar-SA" sz="950" b="1" dirty="0">
                 <a:solidFill>
                   <a:srgbClr val="FFFFFF"/>
                 </a:solidFill>
                 <a:latin typeface="Calibri" pitchFamily="34" charset="0"/>
+                <a:ea typeface="Amiri" pitchFamily="2" charset="-78"/>
                 <a:cs typeface="Amiri" pitchFamily="2" charset="-78"/>
               </a:rPr>
               <a:t>لَيْسَتْ مَغْرُورَةً، بَلْ</a:t>
@@ -5005,11 +5038,12 @@
               <a:buNone/>
             </a:pPr>
             <a:r>
-              <a:rPr lang="en-US" sz="950" b="1" dirty="0">
+              <a:rPr lang="ar-SA" sz="950" b="1" dirty="0">
                 <a:solidFill>
                   <a:srgbClr val="FFFFFF"/>
                 </a:solidFill>
                 <a:latin typeface="Calibri" pitchFamily="34" charset="0"/>
+                <a:ea typeface="Amiri" pitchFamily="2" charset="-78"/>
                 <a:cs typeface="Amiri" pitchFamily="2" charset="-78"/>
               </a:rPr>
               <a:t>إِذَا جِئْتِ … فَسَأُعَرِّفُكِ</a:t>
@@ -5143,6 +5177,7 @@
                   <a:srgbClr val="D4AF37"/>
                 </a:solidFill>
                 <a:latin typeface="Amiri" pitchFamily="2" charset="-78"/>
+                <a:ea typeface="Amiri" pitchFamily="2" charset="-78"/>
                 <a:cs typeface="Amiri" pitchFamily="2" charset="-78"/>
               </a:rPr>
               <a:t>م</a:t>
@@ -5463,6 +5498,7 @@
                   <a:srgbClr val="8A6D1E"/>
                 </a:solidFill>
                 <a:latin typeface="Amiri" pitchFamily="2" charset="-78"/>
+                <a:ea typeface="Amiri" pitchFamily="2" charset="-78"/>
                 <a:cs typeface="Amiri" pitchFamily="2" charset="-78"/>
               </a:rPr>
               <a:t>اخْتَرْ عُنْوَانًا وَاحِدًا</a:t>
@@ -5743,6 +5779,7 @@
                   <a:srgbClr val="1B3B6F"/>
                 </a:solidFill>
                 <a:latin typeface="Amiri" pitchFamily="2" charset="-78"/>
+                <a:ea typeface="Amiri" pitchFamily="2" charset="-78"/>
                 <a:cs typeface="Amiri" pitchFamily="2" charset="-78"/>
               </a:rPr>
               <a:t>شَخْصٌ أُعْجَبُ بِهِ</a:t>
@@ -5781,6 +5818,7 @@
                   <a:srgbClr val="1B3B6F"/>
                 </a:solidFill>
                 <a:latin typeface="Amiri" pitchFamily="2" charset="-78"/>
+                <a:ea typeface="Amiri" pitchFamily="2" charset="-78"/>
                 <a:cs typeface="Amiri" pitchFamily="2" charset="-78"/>
               </a:rPr>
               <a:t>(أ)</a:t>
@@ -5887,6 +5925,7 @@
                   <a:srgbClr val="1B3B6F"/>
                 </a:solidFill>
                 <a:latin typeface="Amiri" pitchFamily="2" charset="-78"/>
+                <a:ea typeface="Amiri" pitchFamily="2" charset="-78"/>
                 <a:cs typeface="Amiri" pitchFamily="2" charset="-78"/>
               </a:rPr>
               <a:t>مَنْ هُوَ؟ وَكَيْفَ شَكْلُهُ؟ · شَخْصِيَّتُهُ وَصِفَاتُهُ · مَوْقِفٌ لَا تَنْسَاهُ مَعَهُ · مَاذَا تَعَلَّمْتَ مِنْهُ؟</a:t>
@@ -6018,6 +6057,7 @@
                   <a:srgbClr val="1B3B6F"/>
                 </a:solidFill>
                 <a:latin typeface="Amiri" pitchFamily="2" charset="-78"/>
+                <a:ea typeface="Amiri" pitchFamily="2" charset="-78"/>
                 <a:cs typeface="Amiri" pitchFamily="2" charset="-78"/>
               </a:rPr>
               <a:t>المَظْهَرُ أَمِ الشَّخْصِيَّةُ؟</a:t>
@@ -6056,6 +6096,7 @@
                   <a:srgbClr val="1B3B6F"/>
                 </a:solidFill>
                 <a:latin typeface="Amiri" pitchFamily="2" charset="-78"/>
+                <a:ea typeface="Amiri" pitchFamily="2" charset="-78"/>
                 <a:cs typeface="Amiri" pitchFamily="2" charset="-78"/>
               </a:rPr>
               <a:t>(ب)</a:t>
@@ -6162,6 +6203,7 @@
                   <a:srgbClr val="1B3B6F"/>
                 </a:solidFill>
                 <a:latin typeface="Amiri" pitchFamily="2" charset="-78"/>
+                <a:ea typeface="Amiri" pitchFamily="2" charset="-78"/>
                 <a:cs typeface="Amiri" pitchFamily="2" charset="-78"/>
               </a:rPr>
               <a:t>اهْتِمَامُ النَّاسِ بِالمَظْهَرِ اليَوْمَ · المَاضِي وَالحَاضِرُ · تَجْرِبَةٌ عَلَّمَتْكَ دَرْسًا · رَأْيُكَ وَاقْتِرَاحُكَ</a:t>
@@ -6361,6 +6403,7 @@
                   <a:srgbClr val="D4AF37"/>
                 </a:solidFill>
                 <a:latin typeface="Amiri" pitchFamily="2" charset="-78"/>
+                <a:ea typeface="Amiri" pitchFamily="2" charset="-78"/>
                 <a:cs typeface="Amiri" pitchFamily="2" charset="-78"/>
               </a:rPr>
               <a:t>م</a:t>
@@ -6681,6 +6724,7 @@
                   <a:srgbClr val="8A6D1E"/>
                 </a:solidFill>
                 <a:latin typeface="Amiri" pitchFamily="2" charset="-78"/>
+                <a:ea typeface="Amiri" pitchFamily="2" charset="-78"/>
                 <a:cs typeface="Amiri" pitchFamily="2" charset="-78"/>
               </a:rPr>
               <a:t>خُطَّةُ الكِتَابَةِ</a:t>
@@ -7305,6 +7349,7 @@
                   <a:srgbClr val="1B3B6F"/>
                 </a:solidFill>
                 <a:latin typeface="Amiri" pitchFamily="2" charset="-78"/>
+                <a:ea typeface="Amiri" pitchFamily="2" charset="-78"/>
                 <a:cs typeface="Amiri" pitchFamily="2" charset="-78"/>
               </a:rPr>
               <a:t>جَدِّي طَوِيلٌ، وَشَعْرُهُ أَبْيَضُ.</a:t>
@@ -7404,6 +7449,7 @@
                   <a:srgbClr val="1B3B6F"/>
                 </a:solidFill>
                 <a:latin typeface="Amiri" pitchFamily="2" charset="-78"/>
+                <a:ea typeface="Amiri" pitchFamily="2" charset="-78"/>
                 <a:cs typeface="Amiri" pitchFamily="2" charset="-78"/>
               </a:rPr>
               <a:t>عِنْدَمَا كُنْتُ صَغِيرًا، كَانَ يَأْخُذُنِي إِلَى المَسْجِدِ.</a:t>
@@ -7503,6 +7549,7 @@
                   <a:srgbClr val="1B3B6F"/>
                 </a:solidFill>
                 <a:latin typeface="Amiri" pitchFamily="2" charset="-78"/>
+                <a:ea typeface="Amiri" pitchFamily="2" charset="-78"/>
                 <a:cs typeface="Amiri" pitchFamily="2" charset="-78"/>
               </a:rPr>
               <a:t>سَأَكُونُ صَبُورًا مِثْلَهُ.</a:t>
@@ -7664,6 +7711,7 @@
                   <a:srgbClr val="1F2A37"/>
                 </a:solidFill>
                 <a:latin typeface="Amiri" pitchFamily="2" charset="-78"/>
+                <a:ea typeface="Amiri" pitchFamily="2" charset="-78"/>
                 <a:cs typeface="Amiri" pitchFamily="2" charset="-78"/>
               </a:rPr>
               <a:t>أ</a:t>
@@ -7690,6 +7738,7 @@
                   <a:srgbClr val="1F2A37"/>
                 </a:solidFill>
                 <a:latin typeface="Amiri" pitchFamily="2" charset="-78"/>
+                <a:ea typeface="Amiri" pitchFamily="2" charset="-78"/>
                 <a:cs typeface="Amiri" pitchFamily="2" charset="-78"/>
               </a:rPr>
               <a:t>ب</a:t>
@@ -7836,6 +7885,7 @@
                   <a:srgbClr val="D4AF37"/>
                 </a:solidFill>
                 <a:latin typeface="Amiri" pitchFamily="2" charset="-78"/>
+                <a:ea typeface="Amiri" pitchFamily="2" charset="-78"/>
                 <a:cs typeface="Amiri" pitchFamily="2" charset="-78"/>
               </a:rPr>
               <a:t>م</a:t>
@@ -8093,6 +8143,7 @@
                   <a:srgbClr val="8A6D1E"/>
                 </a:solidFill>
                 <a:latin typeface="Amiri" pitchFamily="2" charset="-78"/>
+                <a:ea typeface="Amiri" pitchFamily="2" charset="-78"/>
                 <a:cs typeface="Amiri" pitchFamily="2" charset="-78"/>
               </a:rPr>
               <a:t>أ</a:t>
@@ -8157,6 +8208,7 @@
                   <a:srgbClr val="1B3B6F"/>
                 </a:solidFill>
                 <a:latin typeface="Amiri" pitchFamily="2" charset="-78"/>
+                <a:ea typeface="Amiri" pitchFamily="2" charset="-78"/>
                 <a:cs typeface="Amiri" pitchFamily="2" charset="-78"/>
               </a:rPr>
               <a:t>أ</a:t>
@@ -8208,6 +8260,7 @@
                   <a:srgbClr val="8A6D1E"/>
                 </a:solidFill>
                 <a:latin typeface="Amiri" pitchFamily="2" charset="-78"/>
+                <a:ea typeface="Amiri" pitchFamily="2" charset="-78"/>
                 <a:cs typeface="Amiri" pitchFamily="2" charset="-78"/>
               </a:rPr>
               <a:t>نَمُوذَجُ الإِجَابَةِ</a:t>
@@ -8321,6 +8374,7 @@
                   <a:srgbClr val="1F2A37"/>
                 </a:solidFill>
                 <a:latin typeface="Amiri" pitchFamily="2" charset="-78"/>
+                <a:ea typeface="Amiri" pitchFamily="2" charset="-78"/>
                 <a:cs typeface="Amiri" pitchFamily="2" charset="-78"/>
               </a:rPr>
               <a:t>الشَّخْصُ الَّذِي أُعْجَبُ بِهِ كَثِيرًا هُوَ جَدِّي عَبْدُ اللّٰهِ. عُمْرُهُ سَبْعُونَ سَنَةً، وَهُوَ يَسْكُنُ مَعَنَا فِي البَيْتِ. جَدِّي طَوِيلٌ وَنَحِيفٌ، وَشَعْرُهُ أَبْيَضُ، وَلَهُ لِحْيَةٌ بَيْضَاءُ قَصِيرَةٌ. يَلْبَسُ نَظَّارَةً، وَيَمْشِي بِعَصًا خَشَبِيَّةٍ قَدِيمَةٍ، لِأَنَّ رِجْلَهُ تُؤْلِمُهُ أَحْيَانًا.</a:t>
@@ -8340,6 +8394,7 @@
                   <a:srgbClr val="1F2A37"/>
                 </a:solidFill>
                 <a:latin typeface="Amiri" pitchFamily="2" charset="-78"/>
+                <a:ea typeface="Amiri" pitchFamily="2" charset="-78"/>
                 <a:cs typeface="Amiri" pitchFamily="2" charset="-78"/>
               </a:rPr>
               <a:t>جَدِّي هَادِئٌ وَصَبُورٌ وَكَرِيمٌ. هُوَ لَيْسَ صَارِمًا أَبَدًا، بَلْ يَضْحَكُ كَثِيرًا وَيَحْكِي لَنَا النُّكَتَ. كُلُّ النَّاسِ فِي الحَيِّ يُحِبُّونَهُ، لِأَنَّهُ يُسَاعِدُ الجَمِيعَ.</a:t>
@@ -8359,6 +8414,7 @@
                   <a:srgbClr val="1F2A37"/>
                 </a:solidFill>
                 <a:latin typeface="Amiri" pitchFamily="2" charset="-78"/>
+                <a:ea typeface="Amiri" pitchFamily="2" charset="-78"/>
                 <a:cs typeface="Amiri" pitchFamily="2" charset="-78"/>
               </a:rPr>
               <a:t>عِنْدَمَا كُنْتُ صَغِيرًا، كَانَ جَدِّي يَأْخُذُنِي إِلَى المَسْجِدِ كُلَّ يَوْمِ جُمُعَةٍ. وَفِي السَّنَةِ المَاضِيَةِ عَلَّمَنِي كَيْفَ أَزْرَعُ الطَّمَاطِمَ فِي الحَدِيقَةِ. كَانَ ذٰلِكَ مُمْتِعًا جِدًّا، وَأَكَلْنَا الطَّمَاطِمَ مَعًا فِي الصَّيْفِ، وَكَانَتْ أَلَذَّ مِنْ طَمَاطِمِ السُّوقِ.</a:t>
@@ -8378,6 +8434,7 @@
                   <a:srgbClr val="1F2A37"/>
                 </a:solidFill>
                 <a:latin typeface="Amiri" pitchFamily="2" charset="-78"/>
+                <a:ea typeface="Amiri" pitchFamily="2" charset="-78"/>
                 <a:cs typeface="Amiri" pitchFamily="2" charset="-78"/>
               </a:rPr>
               <a:t>فِي رَأْيِي، جَدِّي أَحْسَنُ رَجُلٍ فِي العَالَمِ. فِي المُسْتَقْبَلِ أُرِيدُ أَنْ أَكُونَ صَبُورًا وَكَرِيمًا مِثْلَهُ، وَسَأَزُورُهُ كُلَّ يَوْمٍ عِنْدَمَا أَكْبَرُ.</a:t>
@@ -8541,11 +8598,12 @@
               <a:buNone/>
             </a:pPr>
             <a:r>
-              <a:rPr lang="en-US" sz="950" b="1" dirty="0">
+              <a:rPr lang="ar-SA" sz="950" b="1" dirty="0">
                 <a:solidFill>
                   <a:srgbClr val="FFFFFF"/>
                 </a:solidFill>
                 <a:latin typeface="Calibri" pitchFamily="34" charset="0"/>
+                <a:ea typeface="Amiri" pitchFamily="2" charset="-78"/>
                 <a:cs typeface="Amiri" pitchFamily="2" charset="-78"/>
               </a:rPr>
               <a:t>الشَّخْصُ الَّذِي أُعْجَبُ بِهِ</a:t>
@@ -8606,11 +8664,12 @@
               <a:buNone/>
             </a:pPr>
             <a:r>
-              <a:rPr lang="en-US" sz="950" b="1" dirty="0">
+              <a:rPr lang="ar-SA" sz="950" b="1" dirty="0">
                 <a:solidFill>
                   <a:srgbClr val="FFFFFF"/>
                 </a:solidFill>
                 <a:latin typeface="Calibri" pitchFamily="34" charset="0"/>
+                <a:ea typeface="Amiri" pitchFamily="2" charset="-78"/>
                 <a:cs typeface="Amiri" pitchFamily="2" charset="-78"/>
               </a:rPr>
               <a:t>لَيْسَ صَارِمًا أَبَدًا، بَلْ</a:t>
@@ -8671,11 +8730,12 @@
               <a:buNone/>
             </a:pPr>
             <a:r>
-              <a:rPr lang="en-US" sz="950" b="1" dirty="0">
+              <a:rPr lang="ar-SA" sz="950" b="1" dirty="0">
                 <a:solidFill>
                   <a:srgbClr val="FFFFFF"/>
                 </a:solidFill>
                 <a:latin typeface="Calibri" pitchFamily="34" charset="0"/>
+                <a:ea typeface="Amiri" pitchFamily="2" charset="-78"/>
                 <a:cs typeface="Amiri" pitchFamily="2" charset="-78"/>
               </a:rPr>
               <a:t>كَانَ جَدِّي يَأْخُذُنِي</a:t>
@@ -8736,11 +8796,12 @@
               <a:buNone/>
             </a:pPr>
             <a:r>
-              <a:rPr lang="en-US" sz="950" b="1" dirty="0">
+              <a:rPr lang="ar-SA" sz="950" b="1" dirty="0">
                 <a:solidFill>
                   <a:srgbClr val="FFFFFF"/>
                 </a:solidFill>
                 <a:latin typeface="Calibri" pitchFamily="34" charset="0"/>
+                <a:ea typeface="Amiri" pitchFamily="2" charset="-78"/>
                 <a:cs typeface="Amiri" pitchFamily="2" charset="-78"/>
               </a:rPr>
               <a:t>أُرِيدُ أَنْ أَكُونَ</a:t>
@@ -8874,6 +8935,7 @@
                   <a:srgbClr val="D4AF37"/>
                 </a:solidFill>
                 <a:latin typeface="Amiri" pitchFamily="2" charset="-78"/>
+                <a:ea typeface="Amiri" pitchFamily="2" charset="-78"/>
                 <a:cs typeface="Amiri" pitchFamily="2" charset="-78"/>
               </a:rPr>
               <a:t>م</a:t>
@@ -9131,6 +9193,7 @@
                   <a:srgbClr val="8A6D1E"/>
                 </a:solidFill>
                 <a:latin typeface="Amiri" pitchFamily="2" charset="-78"/>
+                <a:ea typeface="Amiri" pitchFamily="2" charset="-78"/>
                 <a:cs typeface="Amiri" pitchFamily="2" charset="-78"/>
               </a:rPr>
               <a:t>أ</a:t>
@@ -9195,6 +9258,7 @@
                   <a:srgbClr val="1B3B6F"/>
                 </a:solidFill>
                 <a:latin typeface="Amiri" pitchFamily="2" charset="-78"/>
+                <a:ea typeface="Amiri" pitchFamily="2" charset="-78"/>
                 <a:cs typeface="Amiri" pitchFamily="2" charset="-78"/>
               </a:rPr>
               <a:t>أ</a:t>
@@ -9246,6 +9310,7 @@
                   <a:srgbClr val="8A6D1E"/>
                 </a:solidFill>
                 <a:latin typeface="Amiri" pitchFamily="2" charset="-78"/>
+                <a:ea typeface="Amiri" pitchFamily="2" charset="-78"/>
                 <a:cs typeface="Amiri" pitchFamily="2" charset="-78"/>
               </a:rPr>
               <a:t>نَمُوذَجُ الإِجَابَةِ</a:t>
@@ -9359,6 +9424,7 @@
                   <a:srgbClr val="1F2A37"/>
                 </a:solidFill>
                 <a:latin typeface="Amiri" pitchFamily="2" charset="-78"/>
+                <a:ea typeface="Amiri" pitchFamily="2" charset="-78"/>
                 <a:cs typeface="Amiri" pitchFamily="2" charset="-78"/>
               </a:rPr>
               <a:t>هُنَاكَ أَشْخَاصٌ يَتْرُكُونَ أَثَرًا فِي حَيَاتِنَا دُونَ أَنْ يَشْعُرُوا، وَمِنْ هٰؤُلَاءِ مُدَرِّبِي فِي نَادِي السِّبَاحَةِ، الكَابْتِنُ مَازِنٌ. لَيْسَ طَوِيلًا وَلَا قَوِيَّ البِنْيَةِ كَمَا يَتَخَيَّلُ النَّاسُ المُدَرِّبِينَ، بَلْ هُوَ قَصِيرٌ وَنَحِيفٌ، وَلَهُ ابْتِسَامَةٌ لَا تُفَارِقُ وَجْهَهُ، وَشَعْرٌ رَمَادِيٌّ قَصِيرٌ، وَصَوْتٌ هَادِئٌ يُطَمْئِنُ الصِّغَارَ قَبْلَ السِّبَاقَاتِ.</a:t>
@@ -9378,6 +9444,7 @@
                   <a:srgbClr val="1F2A37"/>
                 </a:solidFill>
                 <a:latin typeface="Amiri" pitchFamily="2" charset="-78"/>
+                <a:ea typeface="Amiri" pitchFamily="2" charset="-78"/>
                 <a:cs typeface="Amiri" pitchFamily="2" charset="-78"/>
               </a:rPr>
               <a:t>أَكْثَرُ مَا يُمَيِّزُهُ صَبْرُهُ الكَبِيرُ؛ فَهُوَ لَا يَرْفَعُ صَوْتَهُ أَبَدًا، حَتَّى عِنْدَمَا نُخْطِئُ المَرَّةَ تِلْوَ الأُخْرَى، أَمَّا عِنْدَمَا نَنْجَحُ، فَيَفْرَحُ كَأَنَّهُ هُوَ الَّذِي فَازَ، وَيَحْكِي عَنَّا لِكُلِّ أَوْلِيَاءِ الأُمُورِ بِفَخْرٍ.</a:t>
@@ -9397,6 +9464,7 @@
                   <a:srgbClr val="1F2A37"/>
                 </a:solidFill>
                 <a:latin typeface="Amiri" pitchFamily="2" charset="-78"/>
+                <a:ea typeface="Amiri" pitchFamily="2" charset="-78"/>
                 <a:cs typeface="Amiri" pitchFamily="2" charset="-78"/>
               </a:rPr>
               <a:t>أَتَذَكَّرُ يَوْمًا فِي الشِّتَاءِ المَاضِي، عِنْدَمَا خَسِرْتُ سِبَاقًا مُهِمًّا وَبَكَيْتُ أَمَامَ الجَمِيعِ. لَمْ يَلُمْنِي، بَلْ جَلَسَ بِجَانِبِي وَقَالَ: «الخَسَارَةُ دَرْسٌ، وَلَيْسَتْ نِهَايَةً». بَعْدَ شَهْرَيْنِ فُزْتُ بِالمَرْكَزِ الأَوَّلِ فِي البُطُولَةِ نَفْسِهَا، وَكَانَ هُوَ أَوَّلَ مَنْ عَانَقَنِي.</a:t>
@@ -9416,6 +9484,7 @@
                   <a:srgbClr val="1F2A37"/>
                 </a:solidFill>
                 <a:latin typeface="Amiri" pitchFamily="2" charset="-78"/>
+                <a:ea typeface="Amiri" pitchFamily="2" charset="-78"/>
                 <a:cs typeface="Amiri" pitchFamily="2" charset="-78"/>
               </a:rPr>
               <a:t>صَحِيحٌ أَنَّ المُدَرِّبَ يُعَلِّمُنَا السِّبَاحَةَ، غَيْرَ أَنَّ الكَابْتِنَ مَازِنًا عَلَّمَنِي الصَّبْرَ وَالثِّقَةَ بِالنَّفْسِ. وَلَوْ أَصْبَحْتُ مُدَرِّبًا فِي يَوْمٍ مِنَ الأَيَّامِ، لَعَامَلْتُ طُلَّابِي كَمَا عَامَلَنِي.</a:t>
@@ -9514,11 +9583,12 @@
               <a:buNone/>
             </a:pPr>
             <a:r>
-              <a:rPr lang="en-US" sz="950" b="1" dirty="0">
+              <a:rPr lang="ar-SA" sz="950" b="1" dirty="0">
                 <a:solidFill>
                   <a:srgbClr val="FFFFFF"/>
                 </a:solidFill>
                 <a:latin typeface="Calibri" pitchFamily="34" charset="0"/>
+                <a:ea typeface="Amiri" pitchFamily="2" charset="-78"/>
                 <a:cs typeface="Amiri" pitchFamily="2" charset="-78"/>
               </a:rPr>
               <a:t>لَيْسَ طَوِيلًا وَلَا</a:t>
@@ -9579,11 +9649,12 @@
               <a:buNone/>
             </a:pPr>
             <a:r>
-              <a:rPr lang="en-US" sz="950" b="1" dirty="0">
+              <a:rPr lang="ar-SA" sz="950" b="1" dirty="0">
                 <a:solidFill>
                   <a:srgbClr val="FFFFFF"/>
                 </a:solidFill>
                 <a:latin typeface="Calibri" pitchFamily="34" charset="0"/>
+                <a:ea typeface="Amiri" pitchFamily="2" charset="-78"/>
                 <a:cs typeface="Amiri" pitchFamily="2" charset="-78"/>
               </a:rPr>
               <a:t>أَمَّا عِنْدَمَا … فَيَفْرَحُ كَأَنَّهُ</a:t>
@@ -9644,11 +9715,12 @@
               <a:buNone/>
             </a:pPr>
             <a:r>
-              <a:rPr lang="en-US" sz="950" b="1" dirty="0">
+              <a:rPr lang="ar-SA" sz="950" b="1" dirty="0">
                 <a:solidFill>
                   <a:srgbClr val="FFFFFF"/>
                 </a:solidFill>
                 <a:latin typeface="Calibri" pitchFamily="34" charset="0"/>
+                <a:ea typeface="Amiri" pitchFamily="2" charset="-78"/>
                 <a:cs typeface="Amiri" pitchFamily="2" charset="-78"/>
               </a:rPr>
               <a:t>لَمْ يَلُمْنِي، بَلْ</a:t>
@@ -9709,11 +9781,12 @@
               <a:buNone/>
             </a:pPr>
             <a:r>
-              <a:rPr lang="en-US" sz="950" b="1" dirty="0">
+              <a:rPr lang="ar-SA" sz="950" b="1" dirty="0">
                 <a:solidFill>
                   <a:srgbClr val="FFFFFF"/>
                 </a:solidFill>
                 <a:latin typeface="Calibri" pitchFamily="34" charset="0"/>
+                <a:ea typeface="Amiri" pitchFamily="2" charset="-78"/>
                 <a:cs typeface="Amiri" pitchFamily="2" charset="-78"/>
               </a:rPr>
               <a:t>لَوْ أَصْبَحْتُ … لَعَامَلْتُ</a:t>
@@ -9847,6 +9920,7 @@
                   <a:srgbClr val="D4AF37"/>
                 </a:solidFill>
                 <a:latin typeface="Amiri" pitchFamily="2" charset="-78"/>
+                <a:ea typeface="Amiri" pitchFamily="2" charset="-78"/>
                 <a:cs typeface="Amiri" pitchFamily="2" charset="-78"/>
               </a:rPr>
               <a:t>م</a:t>
@@ -10104,6 +10178,7 @@
                   <a:srgbClr val="8A6D1E"/>
                 </a:solidFill>
                 <a:latin typeface="Amiri" pitchFamily="2" charset="-78"/>
+                <a:ea typeface="Amiri" pitchFamily="2" charset="-78"/>
                 <a:cs typeface="Amiri" pitchFamily="2" charset="-78"/>
               </a:rPr>
               <a:t>ب</a:t>
@@ -10168,6 +10243,7 @@
                   <a:srgbClr val="1B3B6F"/>
                 </a:solidFill>
                 <a:latin typeface="Amiri" pitchFamily="2" charset="-78"/>
+                <a:ea typeface="Amiri" pitchFamily="2" charset="-78"/>
                 <a:cs typeface="Amiri" pitchFamily="2" charset="-78"/>
               </a:rPr>
               <a:t>ب</a:t>
@@ -10219,6 +10295,7 @@
                   <a:srgbClr val="8A6D1E"/>
                 </a:solidFill>
                 <a:latin typeface="Amiri" pitchFamily="2" charset="-78"/>
+                <a:ea typeface="Amiri" pitchFamily="2" charset="-78"/>
                 <a:cs typeface="Amiri" pitchFamily="2" charset="-78"/>
               </a:rPr>
               <a:t>نَمُوذَجُ الإِجَابَةِ</a:t>
@@ -10332,6 +10409,7 @@
                   <a:srgbClr val="1F2A37"/>
                 </a:solidFill>
                 <a:latin typeface="Amiri" pitchFamily="2" charset="-78"/>
+                <a:ea typeface="Amiri" pitchFamily="2" charset="-78"/>
                 <a:cs typeface="Amiri" pitchFamily="2" charset="-78"/>
               </a:rPr>
               <a:t>نَعِيشُ اليَوْمَ فِي عَالَمٍ يَهْتَمُّ بِالمَظْهَرِ اهْتِمَامًا كَبِيرًا؛ فَالإِعْلَانَاتُ وَوَسَائِلُ التَّوَاصُلِ تُظْهِرُ وُجُوهًا مِثَالِيَّةً، مِمَّا يَجْعَلُ كَثِيرًا مِنَ الشَّبَابِ غَيْرَ رَاضِينَ عَنْ أَشْكَالِهِمْ، وَيُنْفِقُونَ أَمْوَالًا كَثِيرَةً عَلَى المَلَابِسِ وَمُسْتَحْضَرَاتِ التَّجْمِيلِ.</a:t>
@@ -10351,6 +10429,7 @@
                   <a:srgbClr val="1F2A37"/>
                 </a:solidFill>
                 <a:latin typeface="Amiri" pitchFamily="2" charset="-78"/>
+                <a:ea typeface="Amiri" pitchFamily="2" charset="-78"/>
                 <a:cs typeface="Amiri" pitchFamily="2" charset="-78"/>
               </a:rPr>
               <a:t>فِي المَاضِي كَانَ النَّاسُ يَحْكُمُونَ عَلَى الشَّخْصِ مِنْ أَخْلَاقِهِ وَسُمْعَتِهِ فِي الحَيِّ، أَمَّا اليَوْمَ فَكَثِيرًا مَا يَحْكُمُونَ عَلَيْهِ مِنْ صُورَةٍ وَاحِدَةٍ عَلَى الإِنْتَرْنِتِ، قَبْلَ أَنْ يَسْمَعُوا كَلِمَةً مِنْهُ، أَوْ يَعْرِفُوا شَيْئًا عَنْ قِصَّتِهِ وَظُرُوفِهِ.</a:t>
@@ -10370,6 +10449,7 @@
                   <a:srgbClr val="1F2A37"/>
                 </a:solidFill>
                 <a:latin typeface="Amiri" pitchFamily="2" charset="-78"/>
+                <a:ea typeface="Amiri" pitchFamily="2" charset="-78"/>
                 <a:cs typeface="Amiri" pitchFamily="2" charset="-78"/>
               </a:rPr>
               <a:t>تَعَلَّمْتُ هٰذَا الدَّرْسَ بِنَفْسِي؛ فَعِنْدَمَا جَاءَتْ طَالِبَةٌ جَدِيدَةٌ إِلَى صَفِّنَا تَلْبَسُ مَلَابِسَ بَسِيطَةً، لَمْ يَهْتَمَّ بِهَا أَحَدٌ فِي البِدَايَةِ. ثُمَّ اكْتَشَفْنَا أَنَّهَا أَذْكَى طَالِبَةٍ فِي المَدْرَسَةِ، وَأَنَّهَا تَتَطَوَّعُ كُلَّ أُسْبُوعٍ فِي دَارٍ لِلْمُسِنِّينَ، فَخَجِلْنَا جَمِيعًا مِنْ حُكْمِنَا السَّرِيعِ عَلَيْهَا.</a:t>
@@ -10389,6 +10469,7 @@
                   <a:srgbClr val="1F2A37"/>
                 </a:solidFill>
                 <a:latin typeface="Amiri" pitchFamily="2" charset="-78"/>
+                <a:ea typeface="Amiri" pitchFamily="2" charset="-78"/>
                 <a:cs typeface="Amiri" pitchFamily="2" charset="-78"/>
               </a:rPr>
               <a:t>صَحِيحٌ أَنَّ المَظْهَرَ المُرَتَّبَ يَتْرُكُ انْطِبَاعًا جَيِّدًا، غَيْرَ أَنَّ الشَّخْصِيَّةَ هِيَ الَّتِي تَبْقَى فِي ذَاكِرَةِ النَّاسِ. وَلَوْ تَعَلَّمْنَا أَنْ نَسْمَعَ قَبْلَ أَنْ نَحْكُمَ، لَاكْتَشَفْنَا كُنُوزًا كَثِيرَةً فِي الأَشْخَاصِ مِنْ حَوْلِنَا.</a:t>
@@ -10487,11 +10568,12 @@
               <a:buNone/>
             </a:pPr>
             <a:r>
-              <a:rPr lang="en-US" sz="950" b="1" dirty="0">
+              <a:rPr lang="ar-SA" sz="950" b="1" dirty="0">
                 <a:solidFill>
                   <a:srgbClr val="FFFFFF"/>
                 </a:solidFill>
                 <a:latin typeface="Calibri" pitchFamily="34" charset="0"/>
+                <a:ea typeface="Amiri" pitchFamily="2" charset="-78"/>
                 <a:cs typeface="Amiri" pitchFamily="2" charset="-78"/>
               </a:rPr>
               <a:t>مِمَّا يَجْعَلُ</a:t>
@@ -10552,11 +10634,12 @@
               <a:buNone/>
             </a:pPr>
             <a:r>
-              <a:rPr lang="en-US" sz="950" b="1" dirty="0">
+              <a:rPr lang="ar-SA" sz="950" b="1" dirty="0">
                 <a:solidFill>
                   <a:srgbClr val="FFFFFF"/>
                 </a:solidFill>
                 <a:latin typeface="Calibri" pitchFamily="34" charset="0"/>
+                <a:ea typeface="Amiri" pitchFamily="2" charset="-78"/>
                 <a:cs typeface="Amiri" pitchFamily="2" charset="-78"/>
               </a:rPr>
               <a:t>أَمَّا اليَوْمَ فَكَثِيرًا مَا</a:t>
@@ -10617,11 +10700,12 @@
               <a:buNone/>
             </a:pPr>
             <a:r>
-              <a:rPr lang="en-US" sz="950" b="1" dirty="0">
+              <a:rPr lang="ar-SA" sz="950" b="1" dirty="0">
                 <a:solidFill>
                   <a:srgbClr val="FFFFFF"/>
                 </a:solidFill>
                 <a:latin typeface="Calibri" pitchFamily="34" charset="0"/>
+                <a:ea typeface="Amiri" pitchFamily="2" charset="-78"/>
                 <a:cs typeface="Amiri" pitchFamily="2" charset="-78"/>
               </a:rPr>
               <a:t>أَذْكَى طَالِبَةٍ</a:t>
@@ -10682,11 +10766,12 @@
               <a:buNone/>
             </a:pPr>
             <a:r>
-              <a:rPr lang="en-US" sz="950" b="1" dirty="0">
+              <a:rPr lang="ar-SA" sz="950" b="1" dirty="0">
                 <a:solidFill>
                   <a:srgbClr val="FFFFFF"/>
                 </a:solidFill>
                 <a:latin typeface="Calibri" pitchFamily="34" charset="0"/>
+                <a:ea typeface="Amiri" pitchFamily="2" charset="-78"/>
                 <a:cs typeface="Amiri" pitchFamily="2" charset="-78"/>
               </a:rPr>
               <a:t>لَوْ تَعَلَّمْنَا … لَاكْتَشَفْنَا</a:t>
@@ -10820,6 +10905,7 @@
                   <a:srgbClr val="D4AF37"/>
                 </a:solidFill>
                 <a:latin typeface="Amiri" pitchFamily="2" charset="-78"/>
+                <a:ea typeface="Amiri" pitchFamily="2" charset="-78"/>
                 <a:cs typeface="Amiri" pitchFamily="2" charset="-78"/>
               </a:rPr>
               <a:t>م</a:t>
@@ -11140,6 +11226,7 @@
                   <a:srgbClr val="8A6D1E"/>
                 </a:solidFill>
                 <a:latin typeface="Amiri" pitchFamily="2" charset="-78"/>
+                <a:ea typeface="Amiri" pitchFamily="2" charset="-78"/>
                 <a:cs typeface="Amiri" pitchFamily="2" charset="-78"/>
               </a:rPr>
               <a:t>قَيِّمْ عَمَلَكَ</a:t>
@@ -12384,6 +12471,7 @@
                   <a:srgbClr val="FFFFFF"/>
                 </a:solidFill>
                 <a:latin typeface="Amiri" pitchFamily="2" charset="-78"/>
+                <a:ea typeface="Amiri" pitchFamily="2" charset="-78"/>
                 <a:cs typeface="Amiri" pitchFamily="2" charset="-78"/>
               </a:rPr>
               <a:t>أَحْسَنْتُمْ! إِلَى اللِّقَاءِ</a:t>
@@ -12536,6 +12624,7 @@
                   <a:srgbClr val="D4AF37"/>
                 </a:solidFill>
                 <a:latin typeface="Amiri" pitchFamily="2" charset="-78"/>
+                <a:ea typeface="Amiri" pitchFamily="2" charset="-78"/>
                 <a:cs typeface="Amiri" pitchFamily="2" charset="-78"/>
               </a:rPr>
               <a:t>وَرْشَةُ التَّدْرِيبِ</a:t>
@@ -12669,6 +12758,7 @@
                   <a:srgbClr val="D4AF37"/>
                 </a:solidFill>
                 <a:latin typeface="Amiri" pitchFamily="2" charset="-78"/>
+                <a:ea typeface="Amiri" pitchFamily="2" charset="-78"/>
                 <a:cs typeface="Amiri" pitchFamily="2" charset="-78"/>
               </a:rPr>
               <a:t>م</a:t>
@@ -12989,6 +13079,7 @@
                   <a:srgbClr val="8A6D1E"/>
                 </a:solidFill>
                 <a:latin typeface="Amiri" pitchFamily="2" charset="-78"/>
+                <a:ea typeface="Amiri" pitchFamily="2" charset="-78"/>
                 <a:cs typeface="Amiri" pitchFamily="2" charset="-78"/>
               </a:rPr>
               <a:t>آدَابُ الصَّفِّ</a:t>
@@ -14520,6 +14611,7 @@
                   <a:srgbClr val="D4AF37"/>
                 </a:solidFill>
                 <a:latin typeface="Amiri" pitchFamily="2" charset="-78"/>
+                <a:ea typeface="Amiri" pitchFamily="2" charset="-78"/>
                 <a:cs typeface="Amiri" pitchFamily="2" charset="-78"/>
               </a:rPr>
               <a:t>م</a:t>
@@ -14840,6 +14932,7 @@
                   <a:srgbClr val="8A6D1E"/>
                 </a:solidFill>
                 <a:latin typeface="Amiri" pitchFamily="2" charset="-78"/>
+                <a:ea typeface="Amiri" pitchFamily="2" charset="-78"/>
                 <a:cs typeface="Amiri" pitchFamily="2" charset="-78"/>
               </a:rPr>
               <a:t>خَرِيطَةُ الوَرْشَةِ</a:t>
@@ -15154,6 +15247,7 @@
                   <a:srgbClr val="1B3B6F"/>
                 </a:solidFill>
                 <a:latin typeface="Amiri" pitchFamily="2" charset="-78"/>
+                <a:ea typeface="Amiri" pitchFamily="2" charset="-78"/>
                 <a:cs typeface="Amiri" pitchFamily="2" charset="-78"/>
               </a:rPr>
               <a:t>كَيْفَ</a:t>
@@ -15430,6 +15524,7 @@
                   <a:srgbClr val="1E6B52"/>
                 </a:solidFill>
                 <a:latin typeface="Amiri" pitchFamily="2" charset="-78"/>
+                <a:ea typeface="Amiri" pitchFamily="2" charset="-78"/>
                 <a:cs typeface="Amiri" pitchFamily="2" charset="-78"/>
               </a:rPr>
               <a:t>الاسْتِمَارَةُ</a:t>
@@ -15706,6 +15801,7 @@
                   <a:srgbClr val="1E6B52"/>
                 </a:solidFill>
                 <a:latin typeface="Amiri" pitchFamily="2" charset="-78"/>
+                <a:ea typeface="Amiri" pitchFamily="2" charset="-78"/>
                 <a:cs typeface="Amiri" pitchFamily="2" charset="-78"/>
               </a:rPr>
               <a:t>الرِّسَالَةُ</a:t>
@@ -15982,6 +16078,7 @@
                   <a:srgbClr val="1E6B52"/>
                 </a:solidFill>
                 <a:latin typeface="Amiri" pitchFamily="2" charset="-78"/>
+                <a:ea typeface="Amiri" pitchFamily="2" charset="-78"/>
                 <a:cs typeface="Amiri" pitchFamily="2" charset="-78"/>
               </a:rPr>
               <a:t>المَقَالُ</a:t>
@@ -16258,6 +16355,7 @@
                   <a:srgbClr val="8A6D1E"/>
                 </a:solidFill>
                 <a:latin typeface="Amiri" pitchFamily="2" charset="-78"/>
+                <a:ea typeface="Amiri" pitchFamily="2" charset="-78"/>
                 <a:cs typeface="Amiri" pitchFamily="2" charset="-78"/>
               </a:rPr>
               <a:t>قَيِّمْ</a:t>
@@ -16501,6 +16599,7 @@
                   <a:srgbClr val="D4AF37"/>
                 </a:solidFill>
                 <a:latin typeface="Amiri" pitchFamily="2" charset="-78"/>
+                <a:ea typeface="Amiri" pitchFamily="2" charset="-78"/>
                 <a:cs typeface="Amiri" pitchFamily="2" charset="-78"/>
               </a:rPr>
               <a:t>م</a:t>
@@ -16821,6 +16920,7 @@
                   <a:srgbClr val="8A6D1E"/>
                 </a:solidFill>
                 <a:latin typeface="Amiri" pitchFamily="2" charset="-78"/>
+                <a:ea typeface="Amiri" pitchFamily="2" charset="-78"/>
                 <a:cs typeface="Amiri" pitchFamily="2" charset="-78"/>
               </a:rPr>
               <a:t>امْتِحَانُ الكِتَابَةِ</a:t>
@@ -17445,6 +17545,7 @@
                   <a:srgbClr val="1B3B6F"/>
                 </a:solidFill>
                 <a:latin typeface="Amiri" pitchFamily="2" charset="-78"/>
+                <a:ea typeface="Amiri" pitchFamily="2" charset="-78"/>
                 <a:cs typeface="Amiri" pitchFamily="2" charset="-78"/>
               </a:rPr>
               <a:t>الطَّالِبَةُ الجَدِيدَةُ الَّتِي أَصْبَحَتْ صَدِيقَتِي</a:t>
@@ -17544,6 +17645,7 @@
                   <a:srgbClr val="1B3B6F"/>
                 </a:solidFill>
                 <a:latin typeface="Amiri" pitchFamily="2" charset="-78"/>
+                <a:ea typeface="Amiri" pitchFamily="2" charset="-78"/>
                 <a:cs typeface="Amiri" pitchFamily="2" charset="-78"/>
               </a:rPr>
               <a:t>لَيْسَتْ مَغْرُورَةً، بَلْ خَجُولَةٌ فَقَطْ</a:t>
@@ -17643,6 +17745,7 @@
                   <a:srgbClr val="1B3B6F"/>
                 </a:solidFill>
                 <a:latin typeface="Amiri" pitchFamily="2" charset="-78"/>
+                <a:ea typeface="Amiri" pitchFamily="2" charset="-78"/>
                 <a:cs typeface="Amiri" pitchFamily="2" charset="-78"/>
               </a:rPr>
               <a:t>ظَنَنْتُ أَنَّهَا … لٰكِنِّي اكْتَشَفْتُ أَنَّهَا …</a:t>
@@ -17814,6 +17917,7 @@
                   <a:srgbClr val="D4AF37"/>
                 </a:solidFill>
                 <a:latin typeface="Amiri" pitchFamily="2" charset="-78"/>
+                <a:ea typeface="Amiri" pitchFamily="2" charset="-78"/>
                 <a:cs typeface="Amiri" pitchFamily="2" charset="-78"/>
               </a:rPr>
               <a:t>م</a:t>
@@ -18134,6 +18238,7 @@
                   <a:srgbClr val="8A6D1E"/>
                 </a:solidFill>
                 <a:latin typeface="Amiri" pitchFamily="2" charset="-78"/>
+                <a:ea typeface="Amiri" pitchFamily="2" charset="-78"/>
                 <a:cs typeface="Amiri" pitchFamily="2" charset="-78"/>
               </a:rPr>
               <a:t>مَلَفُّ بَرْنَامَجِ الأَصْدِقَاءِ</a:t>
@@ -18490,6 +18595,7 @@
                   <a:srgbClr val="1B3B6F"/>
                 </a:solidFill>
                 <a:latin typeface="Amiri" pitchFamily="2" charset="-78"/>
+                <a:ea typeface="Amiri" pitchFamily="2" charset="-78"/>
                 <a:cs typeface="Amiri" pitchFamily="2" charset="-78"/>
               </a:rPr>
               <a:t>الاسْمُ وَالصَّفُّ</a:t>
@@ -18734,6 +18840,7 @@
                   <a:srgbClr val="1B3B6F"/>
                 </a:solidFill>
                 <a:latin typeface="Amiri" pitchFamily="2" charset="-78"/>
+                <a:ea typeface="Amiri" pitchFamily="2" charset="-78"/>
                 <a:cs typeface="Amiri" pitchFamily="2" charset="-78"/>
               </a:rPr>
               <a:t>لَوْنُ الشَّعْرِ</a:t>
@@ -18978,6 +19085,7 @@
                   <a:srgbClr val="1B3B6F"/>
                 </a:solidFill>
                 <a:latin typeface="Amiri" pitchFamily="2" charset="-78"/>
+                <a:ea typeface="Amiri" pitchFamily="2" charset="-78"/>
                 <a:cs typeface="Amiri" pitchFamily="2" charset="-78"/>
               </a:rPr>
               <a:t>لَوْنُ العَيْنَيْنِ</a:t>
@@ -19222,6 +19330,7 @@
                   <a:srgbClr val="1B3B6F"/>
                 </a:solidFill>
                 <a:latin typeface="Amiri" pitchFamily="2" charset="-78"/>
+                <a:ea typeface="Amiri" pitchFamily="2" charset="-78"/>
                 <a:cs typeface="Amiri" pitchFamily="2" charset="-78"/>
               </a:rPr>
               <a:t>الطُّولُ (طَوِيلٌ / قَصِيرٌ / مُتَوَسِّطٌ)</a:t>
@@ -19466,6 +19575,7 @@
                   <a:srgbClr val="1B3B6F"/>
                 </a:solidFill>
                 <a:latin typeface="Amiri" pitchFamily="2" charset="-78"/>
+                <a:ea typeface="Amiri" pitchFamily="2" charset="-78"/>
                 <a:cs typeface="Amiri" pitchFamily="2" charset="-78"/>
               </a:rPr>
               <a:t>ثَلَاثُ صِفَاتٍ لِشَخْصِيَّتِكَ</a:t>
@@ -19710,6 +19820,7 @@
                   <a:srgbClr val="1B3B6F"/>
                 </a:solidFill>
                 <a:latin typeface="Amiri" pitchFamily="2" charset="-78"/>
+                <a:ea typeface="Amiri" pitchFamily="2" charset="-78"/>
                 <a:cs typeface="Amiri" pitchFamily="2" charset="-78"/>
               </a:rPr>
               <a:t>صِفَةٌ لَسْتَ عَلَيْهَا</a:t>
@@ -19954,6 +20065,7 @@
                   <a:srgbClr val="1B3B6F"/>
                 </a:solidFill>
                 <a:latin typeface="Amiri" pitchFamily="2" charset="-78"/>
+                <a:ea typeface="Amiri" pitchFamily="2" charset="-78"/>
                 <a:cs typeface="Amiri" pitchFamily="2" charset="-78"/>
               </a:rPr>
               <a:t>نَوْعُ الصَّدِيقِ الَّذِي تَبْحَثُ عَنْهُ</a:t>
@@ -20133,6 +20245,7 @@
                   <a:srgbClr val="1B3B6F"/>
                 </a:solidFill>
                 <a:latin typeface="Amiri" pitchFamily="2" charset="-78"/>
+                <a:ea typeface="Amiri" pitchFamily="2" charset="-78"/>
                 <a:cs typeface="Amiri" pitchFamily="2" charset="-78"/>
               </a:rPr>
               <a:t>جُمْلَةٌ: مَاذَا يَقُولُ عَنْكَ أَصْدِقَاؤُكَ؟</a:t>
@@ -20342,6 +20455,7 @@
                   <a:srgbClr val="D4AF37"/>
                 </a:solidFill>
                 <a:latin typeface="Amiri" pitchFamily="2" charset="-78"/>
+                <a:ea typeface="Amiri" pitchFamily="2" charset="-78"/>
                 <a:cs typeface="Amiri" pitchFamily="2" charset="-78"/>
               </a:rPr>
               <a:t>م</a:t>
@@ -20662,6 +20776,7 @@
                   <a:srgbClr val="8A6D1E"/>
                 </a:solidFill>
                 <a:latin typeface="Amiri" pitchFamily="2" charset="-78"/>
+                <a:ea typeface="Amiri" pitchFamily="2" charset="-78"/>
                 <a:cs typeface="Amiri" pitchFamily="2" charset="-78"/>
               </a:rPr>
               <a:t>نَمُوذَجُ الإِجَابَةِ</a:t>
@@ -20980,6 +21095,7 @@
                   <a:srgbClr val="1B3B6F"/>
                 </a:solidFill>
                 <a:latin typeface="Amiri" pitchFamily="2" charset="-78"/>
+                <a:ea typeface="Amiri" pitchFamily="2" charset="-78"/>
                 <a:cs typeface="Amiri" pitchFamily="2" charset="-78"/>
               </a:rPr>
               <a:t>لَيْلَى عُمَرُ، الصَّفُّ العَاشِرُ</a:t>
@@ -21018,6 +21134,7 @@
                   <a:srgbClr val="1B3B6F"/>
                 </a:solidFill>
                 <a:latin typeface="Amiri" pitchFamily="2" charset="-78"/>
+                <a:ea typeface="Amiri" pitchFamily="2" charset="-78"/>
                 <a:cs typeface="Amiri" pitchFamily="2" charset="-78"/>
               </a:rPr>
               <a:t>الاسْمُ وَالصَّفُّ</a:t>
@@ -21159,6 +21276,7 @@
                   <a:srgbClr val="1B3B6F"/>
                 </a:solidFill>
                 <a:latin typeface="Amiri" pitchFamily="2" charset="-78"/>
+                <a:ea typeface="Amiri" pitchFamily="2" charset="-78"/>
                 <a:cs typeface="Amiri" pitchFamily="2" charset="-78"/>
               </a:rPr>
               <a:t>بُنِّيٌّ</a:t>
@@ -21197,6 +21315,7 @@
                   <a:srgbClr val="1B3B6F"/>
                 </a:solidFill>
                 <a:latin typeface="Amiri" pitchFamily="2" charset="-78"/>
+                <a:ea typeface="Amiri" pitchFamily="2" charset="-78"/>
                 <a:cs typeface="Amiri" pitchFamily="2" charset="-78"/>
               </a:rPr>
               <a:t>لَوْنُ الشَّعْرِ</a:t>
@@ -21338,6 +21457,7 @@
                   <a:srgbClr val="1B3B6F"/>
                 </a:solidFill>
                 <a:latin typeface="Amiri" pitchFamily="2" charset="-78"/>
+                <a:ea typeface="Amiri" pitchFamily="2" charset="-78"/>
                 <a:cs typeface="Amiri" pitchFamily="2" charset="-78"/>
               </a:rPr>
               <a:t>عَسَلِيَّتَانِ</a:t>
@@ -21376,6 +21496,7 @@
                   <a:srgbClr val="1B3B6F"/>
                 </a:solidFill>
                 <a:latin typeface="Amiri" pitchFamily="2" charset="-78"/>
+                <a:ea typeface="Amiri" pitchFamily="2" charset="-78"/>
                 <a:cs typeface="Amiri" pitchFamily="2" charset="-78"/>
               </a:rPr>
               <a:t>لَوْنُ العَيْنَيْنِ</a:t>
@@ -21517,6 +21638,7 @@
                   <a:srgbClr val="1B3B6F"/>
                 </a:solidFill>
                 <a:latin typeface="Amiri" pitchFamily="2" charset="-78"/>
+                <a:ea typeface="Amiri" pitchFamily="2" charset="-78"/>
                 <a:cs typeface="Amiri" pitchFamily="2" charset="-78"/>
               </a:rPr>
               <a:t>مُتَوَسِّطَةُ الطُّولِ</a:t>
@@ -21555,6 +21677,7 @@
                   <a:srgbClr val="1B3B6F"/>
                 </a:solidFill>
                 <a:latin typeface="Amiri" pitchFamily="2" charset="-78"/>
+                <a:ea typeface="Amiri" pitchFamily="2" charset="-78"/>
                 <a:cs typeface="Amiri" pitchFamily="2" charset="-78"/>
               </a:rPr>
               <a:t>الطُّولُ (طَوِيلٌ / قَصِيرٌ / مُتَوَسِّطٌ)</a:t>
@@ -21696,6 +21819,7 @@
                   <a:srgbClr val="1B3B6F"/>
                 </a:solidFill>
                 <a:latin typeface="Amiri" pitchFamily="2" charset="-78"/>
+                <a:ea typeface="Amiri" pitchFamily="2" charset="-78"/>
                 <a:cs typeface="Amiri" pitchFamily="2" charset="-78"/>
               </a:rPr>
               <a:t>مَرِحَةٌ وَصَبُورَةٌ وَمُنَظَّمَةٌ</a:t>
@@ -21734,6 +21858,7 @@
                   <a:srgbClr val="1B3B6F"/>
                 </a:solidFill>
                 <a:latin typeface="Amiri" pitchFamily="2" charset="-78"/>
+                <a:ea typeface="Amiri" pitchFamily="2" charset="-78"/>
                 <a:cs typeface="Amiri" pitchFamily="2" charset="-78"/>
               </a:rPr>
               <a:t>ثَلَاثُ صِفَاتٍ لِشَخْصِيَّتِكَ</a:t>
@@ -21875,6 +22000,7 @@
                   <a:srgbClr val="1B3B6F"/>
                 </a:solidFill>
                 <a:latin typeface="Amiri" pitchFamily="2" charset="-78"/>
+                <a:ea typeface="Amiri" pitchFamily="2" charset="-78"/>
                 <a:cs typeface="Amiri" pitchFamily="2" charset="-78"/>
               </a:rPr>
               <a:t>لَسْتُ كَسُولَةً</a:t>
@@ -21913,6 +22039,7 @@
                   <a:srgbClr val="1B3B6F"/>
                 </a:solidFill>
                 <a:latin typeface="Amiri" pitchFamily="2" charset="-78"/>
+                <a:ea typeface="Amiri" pitchFamily="2" charset="-78"/>
                 <a:cs typeface="Amiri" pitchFamily="2" charset="-78"/>
               </a:rPr>
               <a:t>صِفَةٌ لَسْتَ عَلَيْهَا</a:t>
@@ -22054,6 +22181,7 @@
                   <a:srgbClr val="1B3B6F"/>
                 </a:solidFill>
                 <a:latin typeface="Amiri" pitchFamily="2" charset="-78"/>
+                <a:ea typeface="Amiri" pitchFamily="2" charset="-78"/>
                 <a:cs typeface="Amiri" pitchFamily="2" charset="-78"/>
               </a:rPr>
               <a:t>صَدِيقَةٌ صَادِقَةٌ تُحِبُّ القِرَاءَةَ</a:t>
@@ -22092,6 +22220,7 @@
                   <a:srgbClr val="1B3B6F"/>
                 </a:solidFill>
                 <a:latin typeface="Amiri" pitchFamily="2" charset="-78"/>
+                <a:ea typeface="Amiri" pitchFamily="2" charset="-78"/>
                 <a:cs typeface="Amiri" pitchFamily="2" charset="-78"/>
               </a:rPr>
               <a:t>نَوْعُ الصَّدِيقِ الَّذِي تَبْحَثُ عَنْهُ</a:t>
@@ -22233,6 +22362,7 @@
                   <a:srgbClr val="1B3B6F"/>
                 </a:solidFill>
                 <a:latin typeface="Amiri" pitchFamily="2" charset="-78"/>
+                <a:ea typeface="Amiri" pitchFamily="2" charset="-78"/>
                 <a:cs typeface="Amiri" pitchFamily="2" charset="-78"/>
               </a:rPr>
               <a:t>يَقُولُ أَصْدِقَائِي إِنِّي الصَّدِيقَةُ الَّتِي تَسْمَعُ دَائِمًا.</a:t>
@@ -22271,6 +22401,7 @@
                   <a:srgbClr val="1B3B6F"/>
                 </a:solidFill>
                 <a:latin typeface="Amiri" pitchFamily="2" charset="-78"/>
+                <a:ea typeface="Amiri" pitchFamily="2" charset="-78"/>
                 <a:cs typeface="Amiri" pitchFamily="2" charset="-78"/>
               </a:rPr>
               <a:t>جُمْلَةٌ: مَاذَا يَقُولُ عَنْكَ أَصْدِقَاؤُكَ؟</a:t>
@@ -22480,6 +22611,7 @@
                   <a:srgbClr val="D4AF37"/>
                 </a:solidFill>
                 <a:latin typeface="Amiri" pitchFamily="2" charset="-78"/>
+                <a:ea typeface="Amiri" pitchFamily="2" charset="-78"/>
                 <a:cs typeface="Amiri" pitchFamily="2" charset="-78"/>
               </a:rPr>
               <a:t>م</a:t>
@@ -22800,6 +22932,7 @@
                   <a:srgbClr val="8A6D1E"/>
                 </a:solidFill>
                 <a:latin typeface="Amiri" pitchFamily="2" charset="-78"/>
+                <a:ea typeface="Amiri" pitchFamily="2" charset="-78"/>
                 <a:cs typeface="Amiri" pitchFamily="2" charset="-78"/>
               </a:rPr>
               <a:t>رِسَالَةٌ عَنْ صَدِيقَتِي الجَدِيدَةِ</a:t>
@@ -23275,6 +23408,7 @@
                   <a:srgbClr val="1B3B6F"/>
                 </a:solidFill>
                 <a:latin typeface="Amiri" pitchFamily="2" charset="-78"/>
+                <a:ea typeface="Amiri" pitchFamily="2" charset="-78"/>
                 <a:cs typeface="Amiri" pitchFamily="2" charset="-78"/>
               </a:rPr>
               <a:t>هِيَ طَوِيلَةٌ وَشَعْرُهَا …</a:t>
@@ -23351,6 +23485,7 @@
                   <a:srgbClr val="1B3B6F"/>
                 </a:solidFill>
                 <a:latin typeface="Amiri" pitchFamily="2" charset="-78"/>
+                <a:ea typeface="Amiri" pitchFamily="2" charset="-78"/>
                 <a:cs typeface="Amiri" pitchFamily="2" charset="-78"/>
               </a:rPr>
               <a:t>هِيَ لَيْسَتْ … بَلْ …</a:t>
@@ -23427,6 +23562,7 @@
                   <a:srgbClr val="1B3B6F"/>
                 </a:solidFill>
                 <a:latin typeface="Amiri" pitchFamily="2" charset="-78"/>
+                <a:ea typeface="Amiri" pitchFamily="2" charset="-78"/>
                 <a:cs typeface="Amiri" pitchFamily="2" charset="-78"/>
               </a:rPr>
               <a:t>أَمْسِ سَاعَدَتْنِي فِي …</a:t>
@@ -23503,6 +23639,7 @@
                   <a:srgbClr val="1B3B6F"/>
                 </a:solidFill>
                 <a:latin typeface="Amiri" pitchFamily="2" charset="-78"/>
+                <a:ea typeface="Amiri" pitchFamily="2" charset="-78"/>
                 <a:cs typeface="Amiri" pitchFamily="2" charset="-78"/>
               </a:rPr>
               <a:t>سَنَذْهَبُ مَعًا إِلَى …</a:t>
@@ -23674,6 +23811,7 @@
                   <a:srgbClr val="D4AF37"/>
                 </a:solidFill>
                 <a:latin typeface="Amiri" pitchFamily="2" charset="-78"/>
+                <a:ea typeface="Amiri" pitchFamily="2" charset="-78"/>
                 <a:cs typeface="Amiri" pitchFamily="2" charset="-78"/>
               </a:rPr>
               <a:t>م</a:t>
@@ -23994,6 +24132,7 @@
                   <a:srgbClr val="8A6D1E"/>
                 </a:solidFill>
                 <a:latin typeface="Amiri" pitchFamily="2" charset="-78"/>
+                <a:ea typeface="Amiri" pitchFamily="2" charset="-78"/>
                 <a:cs typeface="Amiri" pitchFamily="2" charset="-78"/>
               </a:rPr>
               <a:t>نَصُّ السُّؤَالِ</a:t>
@@ -24274,6 +24413,7 @@
                   <a:srgbClr val="1B3B6F"/>
                 </a:solidFill>
                 <a:latin typeface="Amiri" pitchFamily="2" charset="-78"/>
+                <a:ea typeface="Amiri" pitchFamily="2" charset="-78"/>
                 <a:cs typeface="Amiri" pitchFamily="2" charset="-78"/>
               </a:rPr>
               <a:t>تَعَرَّفْتِ إِلَى صَدِيقَةٍ جَدِيدَةٍ. اكْتُبِي رِسَالَةً إِلَى صَدِيقَتِكِ (٨٠–٩٠ كَلِمَةً).</a:t>
@@ -24415,6 +24555,7 @@
                   <a:srgbClr val="1B3B6F"/>
                 </a:solidFill>
                 <a:latin typeface="Amiri" pitchFamily="2" charset="-78"/>
+                <a:ea typeface="Amiri" pitchFamily="2" charset="-78"/>
                 <a:cs typeface="Amiri" pitchFamily="2" charset="-78"/>
               </a:rPr>
               <a:t>كَيْفَ شَكْلُ صَدِيقَتِكِ الجَدِيدَةِ؟</a:t>
@@ -24556,6 +24697,7 @@
                   <a:srgbClr val="1B3B6F"/>
                 </a:solidFill>
                 <a:latin typeface="Amiri" pitchFamily="2" charset="-78"/>
+                <a:ea typeface="Amiri" pitchFamily="2" charset="-78"/>
                 <a:cs typeface="Amiri" pitchFamily="2" charset="-78"/>
               </a:rPr>
               <a:t>كَيْفَ شَخْصِيَّتُهَا؟</a:t>
@@ -24697,6 +24839,7 @@
                   <a:srgbClr val="1B3B6F"/>
                 </a:solidFill>
                 <a:latin typeface="Amiri" pitchFamily="2" charset="-78"/>
+                <a:ea typeface="Amiri" pitchFamily="2" charset="-78"/>
                 <a:cs typeface="Amiri" pitchFamily="2" charset="-78"/>
               </a:rPr>
               <a:t>مَاذَا فَعَلَتْ لَكِ مُؤَخَّرًا؟</a:t>
@@ -24838,6 +24981,7 @@
                   <a:srgbClr val="1B3B6F"/>
                 </a:solidFill>
                 <a:latin typeface="Amiri" pitchFamily="2" charset="-78"/>
+                <a:ea typeface="Amiri" pitchFamily="2" charset="-78"/>
                 <a:cs typeface="Amiri" pitchFamily="2" charset="-78"/>
               </a:rPr>
               <a:t>مَاذَا سَتَفْعَلَانِ مَعًا قَرِيبًا؟</a:t>
@@ -25047,6 +25191,7 @@
                   <a:srgbClr val="D4AF37"/>
                 </a:solidFill>
                 <a:latin typeface="Amiri" pitchFamily="2" charset="-78"/>
+                <a:ea typeface="Amiri" pitchFamily="2" charset="-78"/>
                 <a:cs typeface="Amiri" pitchFamily="2" charset="-78"/>
               </a:rPr>
               <a:t>م</a:t>
@@ -25367,6 +25512,7 @@
                   <a:srgbClr val="8A6D1E"/>
                 </a:solidFill>
                 <a:latin typeface="Amiri" pitchFamily="2" charset="-78"/>
+                <a:ea typeface="Amiri" pitchFamily="2" charset="-78"/>
                 <a:cs typeface="Amiri" pitchFamily="2" charset="-78"/>
               </a:rPr>
               <a:t>قَوَالِبُ الكِتَابَةِ</a:t>
@@ -25647,6 +25793,7 @@
                   <a:srgbClr val="1B3B6F"/>
                 </a:solidFill>
                 <a:latin typeface="Amiri" pitchFamily="2" charset="-78"/>
+                <a:ea typeface="Amiri" pitchFamily="2" charset="-78"/>
                 <a:cs typeface="Amiri" pitchFamily="2" charset="-78"/>
               </a:rPr>
               <a:t>مَرْحَبًا يَا ______ ، كَيْفَ حَالُكِ؟</a:t>
@@ -25853,6 +26000,7 @@
                   <a:srgbClr val="1B3B6F"/>
                 </a:solidFill>
                 <a:latin typeface="Amiri" pitchFamily="2" charset="-78"/>
+                <a:ea typeface="Amiri" pitchFamily="2" charset="-78"/>
                 <a:cs typeface="Amiri" pitchFamily="2" charset="-78"/>
               </a:rPr>
               <a:t>عِنْدِي صَدِيقَةٌ جَدِيدَةٌ اسْمُهَا ______ . هِيَ ______ ، وَشَعْرُهَا ______ .</a:t>
@@ -26059,6 +26207,7 @@
                   <a:srgbClr val="1B3B6F"/>
                 </a:solidFill>
                 <a:latin typeface="Amiri" pitchFamily="2" charset="-78"/>
+                <a:ea typeface="Amiri" pitchFamily="2" charset="-78"/>
                 <a:cs typeface="Amiri" pitchFamily="2" charset="-78"/>
               </a:rPr>
               <a:t>هِيَ ______ وَ ______ ، لٰكِنَّهَا ______ .</a:t>
@@ -26265,6 +26414,7 @@
                   <a:srgbClr val="1B3B6F"/>
                 </a:solidFill>
                 <a:latin typeface="Amiri" pitchFamily="2" charset="-78"/>
+                <a:ea typeface="Amiri" pitchFamily="2" charset="-78"/>
                 <a:cs typeface="Amiri" pitchFamily="2" charset="-78"/>
               </a:rPr>
               <a:t>أَمْسِ ______ ، فَشَكَرْتُهَا.</a:t>
@@ -26471,6 +26621,7 @@
                   <a:srgbClr val="1B3B6F"/>
                 </a:solidFill>
                 <a:latin typeface="Amiri" pitchFamily="2" charset="-78"/>
+                <a:ea typeface="Amiri" pitchFamily="2" charset="-78"/>
                 <a:cs typeface="Amiri" pitchFamily="2" charset="-78"/>
               </a:rPr>
               <a:t>فِي نِهَايَةِ الأُسْبُوعِ سَنَذْهَبُ إِلَى ______ مَعًا.</a:t>
@@ -26677,6 +26828,7 @@
                   <a:srgbClr val="1B3B6F"/>
                 </a:solidFill>
                 <a:latin typeface="Amiri" pitchFamily="2" charset="-78"/>
+                <a:ea typeface="Amiri" pitchFamily="2" charset="-78"/>
                 <a:cs typeface="Amiri" pitchFamily="2" charset="-78"/>
               </a:rPr>
               <a:t>مَعَ السَّلَامَةِ، ______</a:t>
@@ -26916,13 +27068,9 @@
     <a:fontScheme name="Office">
       <a:majorFont>
         <a:latin typeface="Calibri Light" panose="020F0302020204030204"/>
-        <a:ea typeface=""/>
-        <a:cs typeface=""/>
-        <a:font script="Jpan" typeface="游ゴシック Light"/>
-        <a:font script="Hang" typeface="맑은 고딕"/>
-        <a:font script="Hans" typeface="等线 Light"/>
-        <a:font script="Hant" typeface="新細明體"/>
-        <a:font script="Arab" typeface="Times New Roman"/>
+        <a:ea typeface="Amiri" pitchFamily="2" charset="-78"/>
+        <a:cs typeface="Amiri" pitchFamily="2" charset="-78"/>
+        <a:font script="Arab" typeface="Amiri"/>
         <a:font script="Hebr" typeface="Times New Roman"/>
         <a:font script="Thai" typeface="Angsana New"/>
         <a:font script="Ethi" typeface="Nyala"/>
@@ -26968,13 +27116,9 @@
       </a:majorFont>
       <a:minorFont>
         <a:latin typeface="Calibri" panose="020F0502020204030204"/>
-        <a:ea typeface=""/>
-        <a:cs typeface=""/>
-        <a:font script="Jpan" typeface="游ゴシック"/>
-        <a:font script="Hang" typeface="맑은 고딕"/>
-        <a:font script="Hans" typeface="等线"/>
-        <a:font script="Hant" typeface="新細明體"/>
-        <a:font script="Arab" typeface="Arial"/>
+        <a:ea typeface="Amiri" pitchFamily="2" charset="-78"/>
+        <a:cs typeface="Amiri" pitchFamily="2" charset="-78"/>
+        <a:font script="Arab" typeface="Amiri"/>
         <a:font script="Hebr" typeface="Arial"/>
         <a:font script="Thai" typeface="Cordia New"/>
         <a:font script="Ethi" typeface="Nyala"/>

--- a/Topic_B/Exam_Practice/TB-L03_Writing_Workshop_Appearance_and_Personality.pptx
+++ b/Topic_B/Exam_Practice/TB-L03_Writing_Workshop_Appearance_and_Personality.pptx
@@ -3848,7 +3848,7 @@
                 <a:solidFill>
                   <a:srgbClr val="FFFFFF"/>
                 </a:solidFill>
-                <a:latin typeface="Calibri" pitchFamily="34" charset="0"/>
+                <a:latin typeface="Amiri" pitchFamily="2" charset="-78"/>
                 <a:ea typeface="Amiri" pitchFamily="2" charset="-78"/>
                 <a:cs typeface="Amiri" pitchFamily="2" charset="-78"/>
               </a:rPr>
@@ -3914,7 +3914,7 @@
                 <a:solidFill>
                   <a:srgbClr val="FFFFFF"/>
                 </a:solidFill>
-                <a:latin typeface="Calibri" pitchFamily="34" charset="0"/>
+                <a:latin typeface="Amiri" pitchFamily="2" charset="-78"/>
                 <a:ea typeface="Amiri" pitchFamily="2" charset="-78"/>
                 <a:cs typeface="Amiri" pitchFamily="2" charset="-78"/>
               </a:rPr>
@@ -3980,7 +3980,7 @@
                 <a:solidFill>
                   <a:srgbClr val="FFFFFF"/>
                 </a:solidFill>
-                <a:latin typeface="Calibri" pitchFamily="34" charset="0"/>
+                <a:latin typeface="Amiri" pitchFamily="2" charset="-78"/>
                 <a:ea typeface="Amiri" pitchFamily="2" charset="-78"/>
                 <a:cs typeface="Amiri" pitchFamily="2" charset="-78"/>
               </a:rPr>
@@ -4046,7 +4046,7 @@
                 <a:solidFill>
                   <a:srgbClr val="FFFFFF"/>
                 </a:solidFill>
-                <a:latin typeface="Calibri" pitchFamily="34" charset="0"/>
+                <a:latin typeface="Amiri" pitchFamily="2" charset="-78"/>
                 <a:ea typeface="Amiri" pitchFamily="2" charset="-78"/>
                 <a:cs typeface="Amiri" pitchFamily="2" charset="-78"/>
               </a:rPr>
@@ -4844,7 +4844,7 @@
                 <a:solidFill>
                   <a:srgbClr val="FFFFFF"/>
                 </a:solidFill>
-                <a:latin typeface="Calibri" pitchFamily="34" charset="0"/>
+                <a:latin typeface="Amiri" pitchFamily="2" charset="-78"/>
                 <a:ea typeface="Amiri" pitchFamily="2" charset="-78"/>
                 <a:cs typeface="Amiri" pitchFamily="2" charset="-78"/>
               </a:rPr>
@@ -4910,7 +4910,7 @@
                 <a:solidFill>
                   <a:srgbClr val="FFFFFF"/>
                 </a:solidFill>
-                <a:latin typeface="Calibri" pitchFamily="34" charset="0"/>
+                <a:latin typeface="Amiri" pitchFamily="2" charset="-78"/>
                 <a:ea typeface="Amiri" pitchFamily="2" charset="-78"/>
                 <a:cs typeface="Amiri" pitchFamily="2" charset="-78"/>
               </a:rPr>
@@ -4976,7 +4976,7 @@
                 <a:solidFill>
                   <a:srgbClr val="FFFFFF"/>
                 </a:solidFill>
-                <a:latin typeface="Calibri" pitchFamily="34" charset="0"/>
+                <a:latin typeface="Amiri" pitchFamily="2" charset="-78"/>
                 <a:ea typeface="Amiri" pitchFamily="2" charset="-78"/>
                 <a:cs typeface="Amiri" pitchFamily="2" charset="-78"/>
               </a:rPr>
@@ -5042,7 +5042,7 @@
                 <a:solidFill>
                   <a:srgbClr val="FFFFFF"/>
                 </a:solidFill>
-                <a:latin typeface="Calibri" pitchFamily="34" charset="0"/>
+                <a:latin typeface="Amiri" pitchFamily="2" charset="-78"/>
                 <a:ea typeface="Amiri" pitchFamily="2" charset="-78"/>
                 <a:cs typeface="Amiri" pitchFamily="2" charset="-78"/>
               </a:rPr>
@@ -8602,7 +8602,7 @@
                 <a:solidFill>
                   <a:srgbClr val="FFFFFF"/>
                 </a:solidFill>
-                <a:latin typeface="Calibri" pitchFamily="34" charset="0"/>
+                <a:latin typeface="Amiri" pitchFamily="2" charset="-78"/>
                 <a:ea typeface="Amiri" pitchFamily="2" charset="-78"/>
                 <a:cs typeface="Amiri" pitchFamily="2" charset="-78"/>
               </a:rPr>
@@ -8668,7 +8668,7 @@
                 <a:solidFill>
                   <a:srgbClr val="FFFFFF"/>
                 </a:solidFill>
-                <a:latin typeface="Calibri" pitchFamily="34" charset="0"/>
+                <a:latin typeface="Amiri" pitchFamily="2" charset="-78"/>
                 <a:ea typeface="Amiri" pitchFamily="2" charset="-78"/>
                 <a:cs typeface="Amiri" pitchFamily="2" charset="-78"/>
               </a:rPr>
@@ -8734,7 +8734,7 @@
                 <a:solidFill>
                   <a:srgbClr val="FFFFFF"/>
                 </a:solidFill>
-                <a:latin typeface="Calibri" pitchFamily="34" charset="0"/>
+                <a:latin typeface="Amiri" pitchFamily="2" charset="-78"/>
                 <a:ea typeface="Amiri" pitchFamily="2" charset="-78"/>
                 <a:cs typeface="Amiri" pitchFamily="2" charset="-78"/>
               </a:rPr>
@@ -8800,7 +8800,7 @@
                 <a:solidFill>
                   <a:srgbClr val="FFFFFF"/>
                 </a:solidFill>
-                <a:latin typeface="Calibri" pitchFamily="34" charset="0"/>
+                <a:latin typeface="Amiri" pitchFamily="2" charset="-78"/>
                 <a:ea typeface="Amiri" pitchFamily="2" charset="-78"/>
                 <a:cs typeface="Amiri" pitchFamily="2" charset="-78"/>
               </a:rPr>
@@ -9587,7 +9587,7 @@
                 <a:solidFill>
                   <a:srgbClr val="FFFFFF"/>
                 </a:solidFill>
-                <a:latin typeface="Calibri" pitchFamily="34" charset="0"/>
+                <a:latin typeface="Amiri" pitchFamily="2" charset="-78"/>
                 <a:ea typeface="Amiri" pitchFamily="2" charset="-78"/>
                 <a:cs typeface="Amiri" pitchFamily="2" charset="-78"/>
               </a:rPr>
@@ -9653,7 +9653,7 @@
                 <a:solidFill>
                   <a:srgbClr val="FFFFFF"/>
                 </a:solidFill>
-                <a:latin typeface="Calibri" pitchFamily="34" charset="0"/>
+                <a:latin typeface="Amiri" pitchFamily="2" charset="-78"/>
                 <a:ea typeface="Amiri" pitchFamily="2" charset="-78"/>
                 <a:cs typeface="Amiri" pitchFamily="2" charset="-78"/>
               </a:rPr>
@@ -9719,7 +9719,7 @@
                 <a:solidFill>
                   <a:srgbClr val="FFFFFF"/>
                 </a:solidFill>
-                <a:latin typeface="Calibri" pitchFamily="34" charset="0"/>
+                <a:latin typeface="Amiri" pitchFamily="2" charset="-78"/>
                 <a:ea typeface="Amiri" pitchFamily="2" charset="-78"/>
                 <a:cs typeface="Amiri" pitchFamily="2" charset="-78"/>
               </a:rPr>
@@ -9785,7 +9785,7 @@
                 <a:solidFill>
                   <a:srgbClr val="FFFFFF"/>
                 </a:solidFill>
-                <a:latin typeface="Calibri" pitchFamily="34" charset="0"/>
+                <a:latin typeface="Amiri" pitchFamily="2" charset="-78"/>
                 <a:ea typeface="Amiri" pitchFamily="2" charset="-78"/>
                 <a:cs typeface="Amiri" pitchFamily="2" charset="-78"/>
               </a:rPr>
@@ -10572,7 +10572,7 @@
                 <a:solidFill>
                   <a:srgbClr val="FFFFFF"/>
                 </a:solidFill>
-                <a:latin typeface="Calibri" pitchFamily="34" charset="0"/>
+                <a:latin typeface="Amiri" pitchFamily="2" charset="-78"/>
                 <a:ea typeface="Amiri" pitchFamily="2" charset="-78"/>
                 <a:cs typeface="Amiri" pitchFamily="2" charset="-78"/>
               </a:rPr>
@@ -10638,7 +10638,7 @@
                 <a:solidFill>
                   <a:srgbClr val="FFFFFF"/>
                 </a:solidFill>
-                <a:latin typeface="Calibri" pitchFamily="34" charset="0"/>
+                <a:latin typeface="Amiri" pitchFamily="2" charset="-78"/>
                 <a:ea typeface="Amiri" pitchFamily="2" charset="-78"/>
                 <a:cs typeface="Amiri" pitchFamily="2" charset="-78"/>
               </a:rPr>
@@ -10704,7 +10704,7 @@
                 <a:solidFill>
                   <a:srgbClr val="FFFFFF"/>
                 </a:solidFill>
-                <a:latin typeface="Calibri" pitchFamily="34" charset="0"/>
+                <a:latin typeface="Amiri" pitchFamily="2" charset="-78"/>
                 <a:ea typeface="Amiri" pitchFamily="2" charset="-78"/>
                 <a:cs typeface="Amiri" pitchFamily="2" charset="-78"/>
               </a:rPr>
@@ -10770,7 +10770,7 @@
                 <a:solidFill>
                   <a:srgbClr val="FFFFFF"/>
                 </a:solidFill>
-                <a:latin typeface="Calibri" pitchFamily="34" charset="0"/>
+                <a:latin typeface="Amiri" pitchFamily="2" charset="-78"/>
                 <a:ea typeface="Amiri" pitchFamily="2" charset="-78"/>
                 <a:cs typeface="Amiri" pitchFamily="2" charset="-78"/>
               </a:rPr>
